--- a/output/presentation_final.pptx
+++ b/output/presentation_final.pptx
@@ -3120,7 +3120,7 @@
               </a:defRPr>
             </a:pPr>
             <a:r>
-              <a:t>AI 自循环任务系统 - 自动化文档生成与本地打通</a:t>
+              <a:t>AI 自循环任务系统</a:t>
             </a:r>
           </a:p>
         </p:txBody>
@@ -3260,7 +3260,7 @@
               <a:defRPr sz="1800"/>
             </a:pPr>
             <a:r>
-              <a:t>生成时间: 2026-09-16 08:06:05</a:t>
+              <a:t>生成时间: 2026-09-16 08:06:35</a:t>
             </a:r>
           </a:p>
           <a:p>
